--- a/Review Materials/Task2 Concept/KW Big Leaf vs Big Tree.pptx
+++ b/Review Materials/Task2 Concept/KW Big Leaf vs Big Tree.pptx
@@ -197,7 +197,7 @@
           <a:p>
             <a:fld id="{57BDF21A-4BCA-4638-9C8F-6054D41A5034}" type="datetimeFigureOut">
               <a:rPr lang="en-001" smtClean="0"/>
-              <a:t>5/1/25</a:t>
+              <a:t>12/9/25</a:t>
             </a:fld>
             <a:endParaRPr lang="en-001"/>
           </a:p>
@@ -527,541 +527,1608 @@
           <a:bodyPr/>
           <a:lstStyle/>
           <a:p>
+            <a:r>
+              <a:rPr lang="en-US" sz="1200" kern="1200" dirty="0">
+                <a:solidFill>
+                  <a:schemeClr val="tx1"/>
+                </a:solidFill>
+                <a:effectLst/>
+                <a:latin typeface="+mn-lt"/>
+                <a:ea typeface="+mn-ea"/>
+                <a:cs typeface="+mn-cs"/>
+              </a:rPr>
+              <a:t>Today I want to introduce a key idea in </a:t>
+            </a:r>
+            <a:r>
+              <a:rPr lang="en-US" sz="1200" b="1" kern="1200" dirty="0">
+                <a:solidFill>
+                  <a:schemeClr val="tx1"/>
+                </a:solidFill>
+                <a:effectLst/>
+                <a:latin typeface="+mn-lt"/>
+                <a:ea typeface="+mn-ea"/>
+                <a:cs typeface="+mn-cs"/>
+              </a:rPr>
+              <a:t>land surface modeling</a:t>
+            </a:r>
+            <a:r>
+              <a:rPr lang="en-US" sz="1200" kern="1200" dirty="0">
+                <a:solidFill>
+                  <a:schemeClr val="tx1"/>
+                </a:solidFill>
+                <a:effectLst/>
+                <a:latin typeface="+mn-lt"/>
+                <a:ea typeface="+mn-ea"/>
+                <a:cs typeface="+mn-cs"/>
+              </a:rPr>
+              <a:t>, the difference between the </a:t>
+            </a:r>
+            <a:r>
+              <a:rPr lang="en-US" sz="1200" b="1" kern="1200" dirty="0">
+                <a:solidFill>
+                  <a:schemeClr val="tx1"/>
+                </a:solidFill>
+                <a:effectLst/>
+                <a:latin typeface="+mn-lt"/>
+                <a:ea typeface="+mn-ea"/>
+                <a:cs typeface="+mn-cs"/>
+              </a:rPr>
+              <a:t>“Big Leaf”</a:t>
+            </a:r>
+            <a:r>
+              <a:rPr lang="en-US" sz="1200" kern="1200" dirty="0">
+                <a:solidFill>
+                  <a:schemeClr val="tx1"/>
+                </a:solidFill>
+                <a:effectLst/>
+                <a:latin typeface="+mn-lt"/>
+                <a:ea typeface="+mn-ea"/>
+                <a:cs typeface="+mn-cs"/>
+              </a:rPr>
+              <a:t> approach and the </a:t>
+            </a:r>
+            <a:r>
+              <a:rPr lang="en-US" sz="1200" b="1" kern="1200" dirty="0">
+                <a:solidFill>
+                  <a:schemeClr val="tx1"/>
+                </a:solidFill>
+                <a:effectLst/>
+                <a:latin typeface="+mn-lt"/>
+                <a:ea typeface="+mn-ea"/>
+                <a:cs typeface="+mn-cs"/>
+              </a:rPr>
+              <a:t>“Big Tree”</a:t>
+            </a:r>
+            <a:r>
+              <a:rPr lang="en-US" sz="1200" kern="1200" dirty="0">
+                <a:solidFill>
+                  <a:schemeClr val="tx1"/>
+                </a:solidFill>
+                <a:effectLst/>
+                <a:latin typeface="+mn-lt"/>
+                <a:ea typeface="+mn-ea"/>
+                <a:cs typeface="+mn-cs"/>
+              </a:rPr>
+              <a:t> approach. This distinction really shapes how we simulate </a:t>
+            </a:r>
+            <a:r>
+              <a:rPr lang="en-US" sz="1200" b="1" kern="1200" dirty="0">
+                <a:solidFill>
+                  <a:schemeClr val="tx1"/>
+                </a:solidFill>
+                <a:effectLst/>
+                <a:latin typeface="+mn-lt"/>
+                <a:ea typeface="+mn-ea"/>
+                <a:cs typeface="+mn-cs"/>
+              </a:rPr>
+              <a:t>water</a:t>
+            </a:r>
+            <a:r>
+              <a:rPr lang="en-US" sz="1200" kern="1200" dirty="0">
+                <a:solidFill>
+                  <a:schemeClr val="tx1"/>
+                </a:solidFill>
+                <a:effectLst/>
+                <a:latin typeface="+mn-lt"/>
+                <a:ea typeface="+mn-ea"/>
+                <a:cs typeface="+mn-cs"/>
+              </a:rPr>
+              <a:t> and </a:t>
+            </a:r>
+            <a:r>
+              <a:rPr lang="en-US" sz="1200" b="1" kern="1200" dirty="0">
+                <a:solidFill>
+                  <a:schemeClr val="tx1"/>
+                </a:solidFill>
+                <a:effectLst/>
+                <a:latin typeface="+mn-lt"/>
+                <a:ea typeface="+mn-ea"/>
+                <a:cs typeface="+mn-cs"/>
+              </a:rPr>
+              <a:t>carbon</a:t>
+            </a:r>
+            <a:r>
+              <a:rPr lang="en-US" sz="1200" kern="1200" dirty="0">
+                <a:solidFill>
+                  <a:schemeClr val="tx1"/>
+                </a:solidFill>
+                <a:effectLst/>
+                <a:latin typeface="+mn-lt"/>
+                <a:ea typeface="+mn-ea"/>
+                <a:cs typeface="+mn-cs"/>
+              </a:rPr>
+              <a:t> movement through ecosystems, which is important for understanding </a:t>
+            </a:r>
+            <a:r>
+              <a:rPr lang="en-US" sz="1200" b="1" kern="1200" dirty="0">
+                <a:solidFill>
+                  <a:schemeClr val="tx1"/>
+                </a:solidFill>
+                <a:effectLst/>
+                <a:latin typeface="+mn-lt"/>
+                <a:ea typeface="+mn-ea"/>
+                <a:cs typeface="+mn-cs"/>
+              </a:rPr>
+              <a:t>droughts</a:t>
+            </a:r>
+            <a:r>
+              <a:rPr lang="en-US" sz="1200" kern="1200" dirty="0">
+                <a:solidFill>
+                  <a:schemeClr val="tx1"/>
+                </a:solidFill>
+                <a:effectLst/>
+                <a:latin typeface="+mn-lt"/>
+                <a:ea typeface="+mn-ea"/>
+                <a:cs typeface="+mn-cs"/>
+              </a:rPr>
+              <a:t>, </a:t>
+            </a:r>
+            <a:r>
+              <a:rPr lang="en-US" sz="1200" b="1" kern="1200" dirty="0">
+                <a:solidFill>
+                  <a:schemeClr val="tx1"/>
+                </a:solidFill>
+                <a:effectLst/>
+                <a:latin typeface="+mn-lt"/>
+                <a:ea typeface="+mn-ea"/>
+                <a:cs typeface="+mn-cs"/>
+              </a:rPr>
+              <a:t>agriculture</a:t>
+            </a:r>
+            <a:r>
+              <a:rPr lang="en-US" sz="1200" kern="1200" dirty="0">
+                <a:solidFill>
+                  <a:schemeClr val="tx1"/>
+                </a:solidFill>
+                <a:effectLst/>
+                <a:latin typeface="+mn-lt"/>
+                <a:ea typeface="+mn-ea"/>
+                <a:cs typeface="+mn-cs"/>
+              </a:rPr>
+              <a:t>, and </a:t>
+            </a:r>
+            <a:r>
+              <a:rPr lang="en-US" sz="1200" b="1" kern="1200" dirty="0">
+                <a:solidFill>
+                  <a:schemeClr val="tx1"/>
+                </a:solidFill>
+                <a:effectLst/>
+                <a:latin typeface="+mn-lt"/>
+                <a:ea typeface="+mn-ea"/>
+                <a:cs typeface="+mn-cs"/>
+              </a:rPr>
+              <a:t>climate change</a:t>
+            </a:r>
+            <a:r>
+              <a:rPr lang="en-US" sz="1200" kern="1200" dirty="0">
+                <a:solidFill>
+                  <a:schemeClr val="tx1"/>
+                </a:solidFill>
+                <a:effectLst/>
+                <a:latin typeface="+mn-lt"/>
+                <a:ea typeface="+mn-ea"/>
+                <a:cs typeface="+mn-cs"/>
+              </a:rPr>
+              <a:t>.</a:t>
+            </a:r>
+          </a:p>
+          <a:p>
+            <a:r>
+              <a:rPr lang="en-US" sz="1200" kern="1200" dirty="0">
+                <a:solidFill>
+                  <a:schemeClr val="tx1"/>
+                </a:solidFill>
+                <a:effectLst/>
+                <a:latin typeface="+mn-lt"/>
+                <a:ea typeface="+mn-ea"/>
+                <a:cs typeface="+mn-cs"/>
+              </a:rPr>
+              <a:t>You can think of a plant as a machine that moves </a:t>
+            </a:r>
+            <a:r>
+              <a:rPr lang="en-US" sz="1200" b="1" kern="1200" dirty="0">
+                <a:solidFill>
+                  <a:schemeClr val="tx1"/>
+                </a:solidFill>
+                <a:effectLst/>
+                <a:latin typeface="+mn-lt"/>
+                <a:ea typeface="+mn-ea"/>
+                <a:cs typeface="+mn-cs"/>
+              </a:rPr>
+              <a:t>water</a:t>
+            </a:r>
+            <a:r>
+              <a:rPr lang="en-US" sz="1200" kern="1200" dirty="0">
+                <a:solidFill>
+                  <a:schemeClr val="tx1"/>
+                </a:solidFill>
+                <a:effectLst/>
+                <a:latin typeface="+mn-lt"/>
+                <a:ea typeface="+mn-ea"/>
+                <a:cs typeface="+mn-cs"/>
+              </a:rPr>
+              <a:t> from the </a:t>
+            </a:r>
+            <a:r>
+              <a:rPr lang="en-US" sz="1200" b="1" kern="1200" dirty="0">
+                <a:solidFill>
+                  <a:schemeClr val="tx1"/>
+                </a:solidFill>
+                <a:effectLst/>
+                <a:latin typeface="+mn-lt"/>
+                <a:ea typeface="+mn-ea"/>
+                <a:cs typeface="+mn-cs"/>
+              </a:rPr>
+              <a:t>soil</a:t>
+            </a:r>
+            <a:r>
+              <a:rPr lang="en-US" sz="1200" kern="1200" dirty="0">
+                <a:solidFill>
+                  <a:schemeClr val="tx1"/>
+                </a:solidFill>
+                <a:effectLst/>
+                <a:latin typeface="+mn-lt"/>
+                <a:ea typeface="+mn-ea"/>
+                <a:cs typeface="+mn-cs"/>
+              </a:rPr>
+              <a:t> up through its body and releases it into the </a:t>
+            </a:r>
+            <a:r>
+              <a:rPr lang="en-US" sz="1200" b="1" kern="1200" dirty="0">
+                <a:solidFill>
+                  <a:schemeClr val="tx1"/>
+                </a:solidFill>
+                <a:effectLst/>
+                <a:latin typeface="+mn-lt"/>
+                <a:ea typeface="+mn-ea"/>
+                <a:cs typeface="+mn-cs"/>
+              </a:rPr>
+              <a:t>atmosphere</a:t>
+            </a:r>
+            <a:r>
+              <a:rPr lang="en-US" sz="1200" kern="1200" dirty="0">
+                <a:solidFill>
+                  <a:schemeClr val="tx1"/>
+                </a:solidFill>
+                <a:effectLst/>
+                <a:latin typeface="+mn-lt"/>
+                <a:ea typeface="+mn-ea"/>
+                <a:cs typeface="+mn-cs"/>
+              </a:rPr>
+              <a:t>, while taking in </a:t>
+            </a:r>
+            <a:r>
+              <a:rPr lang="en-US" sz="1200" b="1" kern="1200" dirty="0">
+                <a:solidFill>
+                  <a:schemeClr val="tx1"/>
+                </a:solidFill>
+                <a:effectLst/>
+                <a:latin typeface="+mn-lt"/>
+                <a:ea typeface="+mn-ea"/>
+                <a:cs typeface="+mn-cs"/>
+              </a:rPr>
+              <a:t>carbon</a:t>
+            </a:r>
+            <a:r>
+              <a:rPr lang="en-US" sz="1200" kern="1200" dirty="0">
+                <a:solidFill>
+                  <a:schemeClr val="tx1"/>
+                </a:solidFill>
+                <a:effectLst/>
+                <a:latin typeface="+mn-lt"/>
+                <a:ea typeface="+mn-ea"/>
+                <a:cs typeface="+mn-cs"/>
+              </a:rPr>
+              <a:t> from the air to grow. To represent this process, scientists use </a:t>
+            </a:r>
+            <a:r>
+              <a:rPr lang="en-US" sz="1200" b="1" kern="1200" dirty="0">
+                <a:solidFill>
+                  <a:schemeClr val="tx1"/>
+                </a:solidFill>
+                <a:effectLst/>
+                <a:latin typeface="+mn-lt"/>
+                <a:ea typeface="+mn-ea"/>
+                <a:cs typeface="+mn-cs"/>
+              </a:rPr>
+              <a:t>computer models</a:t>
+            </a:r>
+            <a:r>
+              <a:rPr lang="en-US" sz="1200" kern="1200" dirty="0">
+                <a:solidFill>
+                  <a:schemeClr val="tx1"/>
+                </a:solidFill>
+                <a:effectLst/>
+                <a:latin typeface="+mn-lt"/>
+                <a:ea typeface="+mn-ea"/>
+                <a:cs typeface="+mn-cs"/>
+              </a:rPr>
+              <a:t>, but how much </a:t>
+            </a:r>
+            <a:r>
+              <a:rPr lang="en-US" sz="1200" b="1" kern="1200" dirty="0">
+                <a:solidFill>
+                  <a:schemeClr val="tx1"/>
+                </a:solidFill>
+                <a:effectLst/>
+                <a:latin typeface="+mn-lt"/>
+                <a:ea typeface="+mn-ea"/>
+                <a:cs typeface="+mn-cs"/>
+              </a:rPr>
+              <a:t>detail</a:t>
+            </a:r>
+            <a:r>
+              <a:rPr lang="en-US" sz="1200" kern="1200" dirty="0">
+                <a:solidFill>
+                  <a:schemeClr val="tx1"/>
+                </a:solidFill>
+                <a:effectLst/>
+                <a:latin typeface="+mn-lt"/>
+                <a:ea typeface="+mn-ea"/>
+                <a:cs typeface="+mn-cs"/>
+              </a:rPr>
+              <a:t> those models include can change the results significantly.</a:t>
+            </a:r>
+          </a:p>
+          <a:p>
+            <a:r>
+              <a:rPr lang="en-US" sz="1200" kern="1200" dirty="0">
+                <a:solidFill>
+                  <a:schemeClr val="tx1"/>
+                </a:solidFill>
+                <a:effectLst/>
+                <a:latin typeface="+mn-lt"/>
+                <a:ea typeface="+mn-ea"/>
+                <a:cs typeface="+mn-cs"/>
+              </a:rPr>
+              <a:t>Most traditional land surface models, like </a:t>
+            </a:r>
+            <a:r>
+              <a:rPr lang="en-US" sz="1200" b="1" kern="1200" dirty="0">
+                <a:solidFill>
+                  <a:schemeClr val="tx1"/>
+                </a:solidFill>
+                <a:effectLst/>
+                <a:latin typeface="+mn-lt"/>
+                <a:ea typeface="+mn-ea"/>
+                <a:cs typeface="+mn-cs"/>
+              </a:rPr>
+              <a:t>Noah-MP</a:t>
+            </a:r>
+            <a:r>
+              <a:rPr lang="en-US" sz="1200" kern="1200" dirty="0">
+                <a:solidFill>
+                  <a:schemeClr val="tx1"/>
+                </a:solidFill>
+                <a:effectLst/>
+                <a:latin typeface="+mn-lt"/>
+                <a:ea typeface="+mn-ea"/>
+                <a:cs typeface="+mn-cs"/>
+              </a:rPr>
+              <a:t>, use the “</a:t>
+            </a:r>
+            <a:r>
+              <a:rPr lang="en-US" sz="1200" b="1" kern="1200" dirty="0">
+                <a:solidFill>
+                  <a:schemeClr val="tx1"/>
+                </a:solidFill>
+                <a:effectLst/>
+                <a:latin typeface="+mn-lt"/>
+                <a:ea typeface="+mn-ea"/>
+                <a:cs typeface="+mn-cs"/>
+              </a:rPr>
+              <a:t>Big Leaf</a:t>
+            </a:r>
+            <a:r>
+              <a:rPr lang="en-US" sz="1200" kern="1200" dirty="0">
+                <a:solidFill>
+                  <a:schemeClr val="tx1"/>
+                </a:solidFill>
+                <a:effectLst/>
+                <a:latin typeface="+mn-lt"/>
+                <a:ea typeface="+mn-ea"/>
+                <a:cs typeface="+mn-cs"/>
+              </a:rPr>
+              <a:t>” concept. In this approach, we imagine the entire plant canopy as one </a:t>
+            </a:r>
+            <a:r>
+              <a:rPr lang="en-US" sz="1200" b="1" kern="1200" dirty="0">
+                <a:solidFill>
+                  <a:schemeClr val="tx1"/>
+                </a:solidFill>
+                <a:effectLst/>
+                <a:latin typeface="+mn-lt"/>
+                <a:ea typeface="+mn-ea"/>
+                <a:cs typeface="+mn-cs"/>
+              </a:rPr>
+              <a:t>giant leaf</a:t>
+            </a:r>
+            <a:r>
+              <a:rPr lang="en-US" sz="1200" kern="1200" dirty="0">
+                <a:solidFill>
+                  <a:schemeClr val="tx1"/>
+                </a:solidFill>
+                <a:effectLst/>
+                <a:latin typeface="+mn-lt"/>
+                <a:ea typeface="+mn-ea"/>
+                <a:cs typeface="+mn-cs"/>
+              </a:rPr>
+              <a:t>, and that big leaf responds directly to </a:t>
+            </a:r>
+            <a:r>
+              <a:rPr lang="en-US" sz="1200" b="1" kern="1200" dirty="0">
+                <a:solidFill>
+                  <a:schemeClr val="tx1"/>
+                </a:solidFill>
+                <a:effectLst/>
+                <a:latin typeface="+mn-lt"/>
+                <a:ea typeface="+mn-ea"/>
+                <a:cs typeface="+mn-cs"/>
+              </a:rPr>
+              <a:t>soil moisture</a:t>
+            </a:r>
+            <a:r>
+              <a:rPr lang="en-US" sz="1200" kern="1200" dirty="0">
+                <a:solidFill>
+                  <a:schemeClr val="tx1"/>
+                </a:solidFill>
+                <a:effectLst/>
+                <a:latin typeface="+mn-lt"/>
+                <a:ea typeface="+mn-ea"/>
+                <a:cs typeface="+mn-cs"/>
+              </a:rPr>
+              <a:t> without representing the plant’s </a:t>
+            </a:r>
+            <a:r>
+              <a:rPr lang="en-US" sz="1200" b="1" kern="1200" dirty="0">
+                <a:solidFill>
+                  <a:schemeClr val="tx1"/>
+                </a:solidFill>
+                <a:effectLst/>
+                <a:latin typeface="+mn-lt"/>
+                <a:ea typeface="+mn-ea"/>
+                <a:cs typeface="+mn-cs"/>
+              </a:rPr>
+              <a:t>internal structure</a:t>
+            </a:r>
+            <a:r>
+              <a:rPr lang="en-US" sz="1200" kern="1200" dirty="0">
+                <a:solidFill>
+                  <a:schemeClr val="tx1"/>
+                </a:solidFill>
+                <a:effectLst/>
+                <a:latin typeface="+mn-lt"/>
+                <a:ea typeface="+mn-ea"/>
+                <a:cs typeface="+mn-cs"/>
+              </a:rPr>
+              <a:t>. It doesn’t capture things like </a:t>
+            </a:r>
+            <a:r>
+              <a:rPr lang="en-US" sz="1200" b="1" kern="1200" dirty="0">
+                <a:solidFill>
+                  <a:schemeClr val="tx1"/>
+                </a:solidFill>
+                <a:effectLst/>
+                <a:latin typeface="+mn-lt"/>
+                <a:ea typeface="+mn-ea"/>
+                <a:cs typeface="+mn-cs"/>
+              </a:rPr>
+              <a:t>stems</a:t>
+            </a:r>
+            <a:r>
+              <a:rPr lang="en-US" sz="1200" kern="1200" dirty="0">
+                <a:solidFill>
+                  <a:schemeClr val="tx1"/>
+                </a:solidFill>
+                <a:effectLst/>
+                <a:latin typeface="+mn-lt"/>
+                <a:ea typeface="+mn-ea"/>
+                <a:cs typeface="+mn-cs"/>
+              </a:rPr>
+              <a:t>, </a:t>
+            </a:r>
+            <a:r>
+              <a:rPr lang="en-US" sz="1200" b="1" kern="1200" dirty="0">
+                <a:solidFill>
+                  <a:schemeClr val="tx1"/>
+                </a:solidFill>
+                <a:effectLst/>
+                <a:latin typeface="+mn-lt"/>
+                <a:ea typeface="+mn-ea"/>
+                <a:cs typeface="+mn-cs"/>
+              </a:rPr>
+              <a:t>roots</a:t>
+            </a:r>
+            <a:r>
+              <a:rPr lang="en-US" sz="1200" kern="1200" dirty="0">
+                <a:solidFill>
+                  <a:schemeClr val="tx1"/>
+                </a:solidFill>
+                <a:effectLst/>
+                <a:latin typeface="+mn-lt"/>
+                <a:ea typeface="+mn-ea"/>
+                <a:cs typeface="+mn-cs"/>
+              </a:rPr>
+              <a:t>, or detailed </a:t>
+            </a:r>
+            <a:r>
+              <a:rPr lang="en-US" sz="1200" b="1" kern="1200" dirty="0">
+                <a:solidFill>
+                  <a:schemeClr val="tx1"/>
+                </a:solidFill>
+                <a:effectLst/>
+                <a:latin typeface="+mn-lt"/>
+                <a:ea typeface="+mn-ea"/>
+                <a:cs typeface="+mn-cs"/>
+              </a:rPr>
+              <a:t>hydraulics</a:t>
+            </a:r>
+            <a:r>
+              <a:rPr lang="en-US" sz="1200" kern="1200" dirty="0">
+                <a:solidFill>
+                  <a:schemeClr val="tx1"/>
+                </a:solidFill>
+                <a:effectLst/>
+                <a:latin typeface="+mn-lt"/>
+                <a:ea typeface="+mn-ea"/>
+                <a:cs typeface="+mn-cs"/>
+              </a:rPr>
+              <a:t>, and instead relies on </a:t>
+            </a:r>
+            <a:r>
+              <a:rPr lang="en-US" sz="1200" b="1" kern="1200" dirty="0">
+                <a:solidFill>
+                  <a:schemeClr val="tx1"/>
+                </a:solidFill>
+                <a:effectLst/>
+                <a:latin typeface="+mn-lt"/>
+                <a:ea typeface="+mn-ea"/>
+                <a:cs typeface="+mn-cs"/>
+              </a:rPr>
+              <a:t>empirical formulas</a:t>
+            </a:r>
+            <a:r>
+              <a:rPr lang="en-US" sz="1200" kern="1200" dirty="0">
+                <a:solidFill>
+                  <a:schemeClr val="tx1"/>
+                </a:solidFill>
+                <a:effectLst/>
+                <a:latin typeface="+mn-lt"/>
+                <a:ea typeface="+mn-ea"/>
+                <a:cs typeface="+mn-cs"/>
+              </a:rPr>
+              <a:t>—essentially rules of thumb—to estimate water loss and carbon uptake. The problem is that this simplification introduces </a:t>
+            </a:r>
+            <a:r>
+              <a:rPr lang="en-US" sz="1200" b="1" kern="1200" dirty="0">
+                <a:solidFill>
+                  <a:schemeClr val="tx1"/>
+                </a:solidFill>
+                <a:effectLst/>
+                <a:latin typeface="+mn-lt"/>
+                <a:ea typeface="+mn-ea"/>
+                <a:cs typeface="+mn-cs"/>
+              </a:rPr>
+              <a:t>uncertainty</a:t>
+            </a:r>
+            <a:r>
+              <a:rPr lang="en-US" sz="1200" kern="1200" dirty="0">
+                <a:solidFill>
+                  <a:schemeClr val="tx1"/>
+                </a:solidFill>
+                <a:effectLst/>
+                <a:latin typeface="+mn-lt"/>
+                <a:ea typeface="+mn-ea"/>
+                <a:cs typeface="+mn-cs"/>
+              </a:rPr>
+              <a:t>, especially during </a:t>
+            </a:r>
+            <a:r>
+              <a:rPr lang="en-US" sz="1200" b="1" kern="1200" dirty="0">
+                <a:solidFill>
+                  <a:schemeClr val="tx1"/>
+                </a:solidFill>
+                <a:effectLst/>
+                <a:latin typeface="+mn-lt"/>
+                <a:ea typeface="+mn-ea"/>
+                <a:cs typeface="+mn-cs"/>
+              </a:rPr>
+              <a:t>droughts</a:t>
+            </a:r>
+            <a:r>
+              <a:rPr lang="en-US" sz="1200" kern="1200" dirty="0">
+                <a:solidFill>
+                  <a:schemeClr val="tx1"/>
+                </a:solidFill>
+                <a:effectLst/>
+                <a:latin typeface="+mn-lt"/>
+                <a:ea typeface="+mn-ea"/>
+                <a:cs typeface="+mn-cs"/>
+              </a:rPr>
+              <a:t> or other </a:t>
+            </a:r>
+            <a:r>
+              <a:rPr lang="en-US" sz="1200" b="1" kern="1200" dirty="0">
+                <a:solidFill>
+                  <a:schemeClr val="tx1"/>
+                </a:solidFill>
+                <a:effectLst/>
+                <a:latin typeface="+mn-lt"/>
+                <a:ea typeface="+mn-ea"/>
+                <a:cs typeface="+mn-cs"/>
+              </a:rPr>
+              <a:t>extreme conditions</a:t>
+            </a:r>
+            <a:r>
+              <a:rPr lang="en-US" sz="1200" kern="1200" dirty="0">
+                <a:solidFill>
+                  <a:schemeClr val="tx1"/>
+                </a:solidFill>
+                <a:effectLst/>
+                <a:latin typeface="+mn-lt"/>
+                <a:ea typeface="+mn-ea"/>
+                <a:cs typeface="+mn-cs"/>
+              </a:rPr>
+              <a:t>.</a:t>
+            </a:r>
+          </a:p>
+          <a:p>
+            <a:r>
+              <a:rPr lang="en-US" sz="1200" kern="1200" dirty="0">
+                <a:solidFill>
+                  <a:schemeClr val="tx1"/>
+                </a:solidFill>
+                <a:effectLst/>
+                <a:latin typeface="+mn-lt"/>
+                <a:ea typeface="+mn-ea"/>
+                <a:cs typeface="+mn-cs"/>
+              </a:rPr>
+              <a:t>The “</a:t>
+            </a:r>
+            <a:r>
+              <a:rPr lang="en-US" sz="1200" b="1" kern="1200" dirty="0">
+                <a:solidFill>
+                  <a:schemeClr val="tx1"/>
+                </a:solidFill>
+                <a:effectLst/>
+                <a:latin typeface="+mn-lt"/>
+                <a:ea typeface="+mn-ea"/>
+                <a:cs typeface="+mn-cs"/>
+              </a:rPr>
+              <a:t>Big Tree</a:t>
+            </a:r>
+            <a:r>
+              <a:rPr lang="en-US" sz="1200" kern="1200" dirty="0">
+                <a:solidFill>
+                  <a:schemeClr val="tx1"/>
+                </a:solidFill>
+                <a:effectLst/>
+                <a:latin typeface="+mn-lt"/>
+                <a:ea typeface="+mn-ea"/>
+                <a:cs typeface="+mn-cs"/>
+              </a:rPr>
+              <a:t>” concept takes a much more </a:t>
+            </a:r>
+            <a:r>
+              <a:rPr lang="en-US" sz="1200" b="1" kern="1200" dirty="0">
+                <a:solidFill>
+                  <a:schemeClr val="tx1"/>
+                </a:solidFill>
+                <a:effectLst/>
+                <a:latin typeface="+mn-lt"/>
+                <a:ea typeface="+mn-ea"/>
+                <a:cs typeface="+mn-cs"/>
+              </a:rPr>
+              <a:t>realistic</a:t>
+            </a:r>
+            <a:r>
+              <a:rPr lang="en-US" sz="1200" kern="1200" dirty="0">
+                <a:solidFill>
+                  <a:schemeClr val="tx1"/>
+                </a:solidFill>
+                <a:effectLst/>
+                <a:latin typeface="+mn-lt"/>
+                <a:ea typeface="+mn-ea"/>
+                <a:cs typeface="+mn-cs"/>
+              </a:rPr>
+              <a:t> approach. Models like </a:t>
+            </a:r>
+            <a:r>
+              <a:rPr lang="en-US" sz="1200" b="1" kern="1200" dirty="0">
+                <a:solidFill>
+                  <a:schemeClr val="tx1"/>
+                </a:solidFill>
+                <a:effectLst/>
+                <a:latin typeface="+mn-lt"/>
+                <a:ea typeface="+mn-ea"/>
+                <a:cs typeface="+mn-cs"/>
+              </a:rPr>
+              <a:t>Noah-MP-PHS</a:t>
+            </a:r>
+            <a:r>
+              <a:rPr lang="en-US" sz="1200" kern="1200" dirty="0">
+                <a:solidFill>
+                  <a:schemeClr val="tx1"/>
+                </a:solidFill>
+                <a:effectLst/>
+                <a:latin typeface="+mn-lt"/>
+                <a:ea typeface="+mn-ea"/>
+                <a:cs typeface="+mn-cs"/>
+              </a:rPr>
+              <a:t> include </a:t>
+            </a:r>
+            <a:r>
+              <a:rPr lang="en-US" sz="1200" b="1" kern="1200" dirty="0">
+                <a:solidFill>
+                  <a:schemeClr val="tx1"/>
+                </a:solidFill>
+                <a:effectLst/>
+                <a:latin typeface="+mn-lt"/>
+                <a:ea typeface="+mn-ea"/>
+                <a:cs typeface="+mn-cs"/>
+              </a:rPr>
+              <a:t>whole-plant hydraulics</a:t>
+            </a:r>
+            <a:r>
+              <a:rPr lang="en-US" sz="1200" kern="1200" dirty="0">
+                <a:solidFill>
+                  <a:schemeClr val="tx1"/>
+                </a:solidFill>
+                <a:effectLst/>
+                <a:latin typeface="+mn-lt"/>
+                <a:ea typeface="+mn-ea"/>
+                <a:cs typeface="+mn-cs"/>
+              </a:rPr>
+              <a:t>, meaning they track water as it moves from the </a:t>
+            </a:r>
+            <a:r>
+              <a:rPr lang="en-US" sz="1200" b="1" kern="1200" dirty="0">
+                <a:solidFill>
+                  <a:schemeClr val="tx1"/>
+                </a:solidFill>
+                <a:effectLst/>
+                <a:latin typeface="+mn-lt"/>
+                <a:ea typeface="+mn-ea"/>
+                <a:cs typeface="+mn-cs"/>
+              </a:rPr>
+              <a:t>soil</a:t>
+            </a:r>
+            <a:r>
+              <a:rPr lang="en-US" sz="1200" kern="1200" dirty="0">
+                <a:solidFill>
+                  <a:schemeClr val="tx1"/>
+                </a:solidFill>
+                <a:effectLst/>
+                <a:latin typeface="+mn-lt"/>
+                <a:ea typeface="+mn-ea"/>
+                <a:cs typeface="+mn-cs"/>
+              </a:rPr>
+              <a:t>, through the </a:t>
+            </a:r>
+            <a:r>
+              <a:rPr lang="en-US" sz="1200" b="1" kern="1200" dirty="0">
+                <a:solidFill>
+                  <a:schemeClr val="tx1"/>
+                </a:solidFill>
+                <a:effectLst/>
+                <a:latin typeface="+mn-lt"/>
+                <a:ea typeface="+mn-ea"/>
+                <a:cs typeface="+mn-cs"/>
+              </a:rPr>
+              <a:t>roots</a:t>
+            </a:r>
+            <a:r>
+              <a:rPr lang="en-US" sz="1200" kern="1200" dirty="0">
+                <a:solidFill>
+                  <a:schemeClr val="tx1"/>
+                </a:solidFill>
+                <a:effectLst/>
+                <a:latin typeface="+mn-lt"/>
+                <a:ea typeface="+mn-ea"/>
+                <a:cs typeface="+mn-cs"/>
+              </a:rPr>
+              <a:t>, up the </a:t>
+            </a:r>
+            <a:r>
+              <a:rPr lang="en-US" sz="1200" b="1" kern="1200" dirty="0">
+                <a:solidFill>
+                  <a:schemeClr val="tx1"/>
+                </a:solidFill>
+                <a:effectLst/>
+                <a:latin typeface="+mn-lt"/>
+                <a:ea typeface="+mn-ea"/>
+                <a:cs typeface="+mn-cs"/>
+              </a:rPr>
+              <a:t>stem</a:t>
+            </a:r>
+            <a:r>
+              <a:rPr lang="en-US" sz="1200" kern="1200" dirty="0">
+                <a:solidFill>
+                  <a:schemeClr val="tx1"/>
+                </a:solidFill>
+                <a:effectLst/>
+                <a:latin typeface="+mn-lt"/>
+                <a:ea typeface="+mn-ea"/>
+                <a:cs typeface="+mn-cs"/>
+              </a:rPr>
+              <a:t>, and into the </a:t>
+            </a:r>
+            <a:r>
+              <a:rPr lang="en-US" sz="1200" b="1" kern="1200" dirty="0">
+                <a:solidFill>
+                  <a:schemeClr val="tx1"/>
+                </a:solidFill>
+                <a:effectLst/>
+                <a:latin typeface="+mn-lt"/>
+                <a:ea typeface="+mn-ea"/>
+                <a:cs typeface="+mn-cs"/>
+              </a:rPr>
+              <a:t>leaves</a:t>
+            </a:r>
+            <a:r>
+              <a:rPr lang="en-US" sz="1200" kern="1200" dirty="0">
+                <a:solidFill>
+                  <a:schemeClr val="tx1"/>
+                </a:solidFill>
+                <a:effectLst/>
+                <a:latin typeface="+mn-lt"/>
+                <a:ea typeface="+mn-ea"/>
+                <a:cs typeface="+mn-cs"/>
+              </a:rPr>
+              <a:t>. This framework includes physical properties like </a:t>
+            </a:r>
+            <a:r>
+              <a:rPr lang="en-US" sz="1200" b="1" kern="1200" dirty="0">
+                <a:solidFill>
+                  <a:schemeClr val="tx1"/>
+                </a:solidFill>
+                <a:effectLst/>
+                <a:latin typeface="+mn-lt"/>
+                <a:ea typeface="+mn-ea"/>
+                <a:cs typeface="+mn-cs"/>
+              </a:rPr>
+              <a:t>root conductance</a:t>
+            </a:r>
+            <a:r>
+              <a:rPr lang="en-US" sz="1200" kern="1200" dirty="0">
+                <a:solidFill>
+                  <a:schemeClr val="tx1"/>
+                </a:solidFill>
+                <a:effectLst/>
+                <a:latin typeface="+mn-lt"/>
+                <a:ea typeface="+mn-ea"/>
+                <a:cs typeface="+mn-cs"/>
+              </a:rPr>
+              <a:t>, </a:t>
+            </a:r>
+            <a:r>
+              <a:rPr lang="en-US" sz="1200" b="1" kern="1200" dirty="0">
+                <a:solidFill>
+                  <a:schemeClr val="tx1"/>
+                </a:solidFill>
+                <a:effectLst/>
+                <a:latin typeface="+mn-lt"/>
+                <a:ea typeface="+mn-ea"/>
+                <a:cs typeface="+mn-cs"/>
+              </a:rPr>
+              <a:t>stem capacitance</a:t>
+            </a:r>
+            <a:r>
+              <a:rPr lang="en-US" sz="1200" kern="1200" dirty="0">
+                <a:solidFill>
+                  <a:schemeClr val="tx1"/>
+                </a:solidFill>
+                <a:effectLst/>
+                <a:latin typeface="+mn-lt"/>
+                <a:ea typeface="+mn-ea"/>
+                <a:cs typeface="+mn-cs"/>
+              </a:rPr>
+              <a:t>, and </a:t>
+            </a:r>
+            <a:r>
+              <a:rPr lang="en-US" sz="1200" b="1" kern="1200" dirty="0">
+                <a:solidFill>
+                  <a:schemeClr val="tx1"/>
+                </a:solidFill>
+                <a:effectLst/>
+                <a:latin typeface="+mn-lt"/>
+                <a:ea typeface="+mn-ea"/>
+                <a:cs typeface="+mn-cs"/>
+              </a:rPr>
+              <a:t>sap flow</a:t>
+            </a:r>
+            <a:r>
+              <a:rPr lang="en-US" sz="1200" kern="1200" dirty="0">
+                <a:solidFill>
+                  <a:schemeClr val="tx1"/>
+                </a:solidFill>
+                <a:effectLst/>
+                <a:latin typeface="+mn-lt"/>
+                <a:ea typeface="+mn-ea"/>
+                <a:cs typeface="+mn-cs"/>
+              </a:rPr>
+              <a:t>, all of which describe how water moves and is stored inside the plant. By modeling the full hydraulic pathway, the Big Tree approach reduces </a:t>
+            </a:r>
+            <a:r>
+              <a:rPr lang="en-US" sz="1200" b="1" kern="1200" dirty="0">
+                <a:solidFill>
+                  <a:schemeClr val="tx1"/>
+                </a:solidFill>
+                <a:effectLst/>
+                <a:latin typeface="+mn-lt"/>
+                <a:ea typeface="+mn-ea"/>
+                <a:cs typeface="+mn-cs"/>
+              </a:rPr>
+              <a:t>uncertainty</a:t>
+            </a:r>
+            <a:r>
+              <a:rPr lang="en-US" sz="1200" kern="1200" dirty="0">
+                <a:solidFill>
+                  <a:schemeClr val="tx1"/>
+                </a:solidFill>
+                <a:effectLst/>
+                <a:latin typeface="+mn-lt"/>
+                <a:ea typeface="+mn-ea"/>
+                <a:cs typeface="+mn-cs"/>
+              </a:rPr>
+              <a:t> and gives us a clearer picture of how plants respond to </a:t>
+            </a:r>
+            <a:r>
+              <a:rPr lang="en-US" sz="1200" b="1" kern="1200" dirty="0">
+                <a:solidFill>
+                  <a:schemeClr val="tx1"/>
+                </a:solidFill>
+                <a:effectLst/>
+                <a:latin typeface="+mn-lt"/>
+                <a:ea typeface="+mn-ea"/>
+                <a:cs typeface="+mn-cs"/>
+              </a:rPr>
+              <a:t>stress</a:t>
+            </a:r>
+            <a:r>
+              <a:rPr lang="en-US" sz="1200" kern="1200" dirty="0">
+                <a:solidFill>
+                  <a:schemeClr val="tx1"/>
+                </a:solidFill>
+                <a:effectLst/>
+                <a:latin typeface="+mn-lt"/>
+                <a:ea typeface="+mn-ea"/>
+                <a:cs typeface="+mn-cs"/>
+              </a:rPr>
+              <a:t>.</a:t>
+            </a:r>
+          </a:p>
+          <a:p>
+            <a:r>
+              <a:rPr lang="en-US" sz="1200" kern="1200" dirty="0">
+                <a:solidFill>
+                  <a:schemeClr val="tx1"/>
+                </a:solidFill>
+                <a:effectLst/>
+                <a:latin typeface="+mn-lt"/>
+                <a:ea typeface="+mn-ea"/>
+                <a:cs typeface="+mn-cs"/>
+              </a:rPr>
+              <a:t>To test whether this new approach performs better, we use data from a real ecosystem site, </a:t>
+            </a:r>
+            <a:r>
+              <a:rPr lang="en-US" sz="1200" b="1" kern="1200" dirty="0">
+                <a:solidFill>
+                  <a:schemeClr val="tx1"/>
+                </a:solidFill>
+                <a:effectLst/>
+                <a:latin typeface="+mn-lt"/>
+                <a:ea typeface="+mn-ea"/>
+                <a:cs typeface="+mn-cs"/>
+              </a:rPr>
+              <a:t>US-Syv</a:t>
+            </a:r>
+            <a:r>
+              <a:rPr lang="en-US" sz="1200" kern="1200" dirty="0">
+                <a:solidFill>
+                  <a:schemeClr val="tx1"/>
+                </a:solidFill>
+                <a:effectLst/>
+                <a:latin typeface="+mn-lt"/>
+                <a:ea typeface="+mn-ea"/>
+                <a:cs typeface="+mn-cs"/>
+              </a:rPr>
+              <a:t>, which provides detailed measurements of </a:t>
+            </a:r>
+            <a:r>
+              <a:rPr lang="en-US" sz="1200" b="1" kern="1200" dirty="0">
+                <a:solidFill>
+                  <a:schemeClr val="tx1"/>
+                </a:solidFill>
+                <a:effectLst/>
+                <a:latin typeface="+mn-lt"/>
+                <a:ea typeface="+mn-ea"/>
+                <a:cs typeface="+mn-cs"/>
+              </a:rPr>
+              <a:t>water</a:t>
+            </a:r>
+            <a:r>
+              <a:rPr lang="en-US" sz="1200" kern="1200" dirty="0">
+                <a:solidFill>
+                  <a:schemeClr val="tx1"/>
+                </a:solidFill>
+                <a:effectLst/>
+                <a:latin typeface="+mn-lt"/>
+                <a:ea typeface="+mn-ea"/>
+                <a:cs typeface="+mn-cs"/>
+              </a:rPr>
+              <a:t> and </a:t>
+            </a:r>
+            <a:r>
+              <a:rPr lang="en-US" sz="1200" b="1" kern="1200" dirty="0">
+                <a:solidFill>
+                  <a:schemeClr val="tx1"/>
+                </a:solidFill>
+                <a:effectLst/>
+                <a:latin typeface="+mn-lt"/>
+                <a:ea typeface="+mn-ea"/>
+                <a:cs typeface="+mn-cs"/>
+              </a:rPr>
+              <a:t>carbon</a:t>
+            </a:r>
+            <a:r>
+              <a:rPr lang="en-US" sz="1200" kern="1200" dirty="0">
+                <a:solidFill>
+                  <a:schemeClr val="tx1"/>
+                </a:solidFill>
+                <a:effectLst/>
+                <a:latin typeface="+mn-lt"/>
+                <a:ea typeface="+mn-ea"/>
+                <a:cs typeface="+mn-cs"/>
+              </a:rPr>
+              <a:t> exchange. We run both models—</a:t>
+            </a:r>
+            <a:r>
+              <a:rPr lang="en-US" sz="1200" b="1" kern="1200" dirty="0">
+                <a:solidFill>
+                  <a:schemeClr val="tx1"/>
+                </a:solidFill>
+                <a:effectLst/>
+                <a:latin typeface="+mn-lt"/>
+                <a:ea typeface="+mn-ea"/>
+                <a:cs typeface="+mn-cs"/>
+              </a:rPr>
+              <a:t>Noah-MP</a:t>
+            </a:r>
+            <a:r>
+              <a:rPr lang="en-US" sz="1200" kern="1200" dirty="0">
+                <a:solidFill>
+                  <a:schemeClr val="tx1"/>
+                </a:solidFill>
+                <a:effectLst/>
+                <a:latin typeface="+mn-lt"/>
+                <a:ea typeface="+mn-ea"/>
+                <a:cs typeface="+mn-cs"/>
+              </a:rPr>
+              <a:t> and </a:t>
+            </a:r>
+            <a:r>
+              <a:rPr lang="en-US" sz="1200" b="1" kern="1200" dirty="0">
+                <a:solidFill>
+                  <a:schemeClr val="tx1"/>
+                </a:solidFill>
+                <a:effectLst/>
+                <a:latin typeface="+mn-lt"/>
+                <a:ea typeface="+mn-ea"/>
+                <a:cs typeface="+mn-cs"/>
+              </a:rPr>
+              <a:t>Noah-MP-PHS</a:t>
+            </a:r>
+            <a:r>
+              <a:rPr lang="en-US" sz="1200" kern="1200" dirty="0">
+                <a:solidFill>
+                  <a:schemeClr val="tx1"/>
+                </a:solidFill>
+                <a:effectLst/>
+                <a:latin typeface="+mn-lt"/>
+                <a:ea typeface="+mn-ea"/>
+                <a:cs typeface="+mn-cs"/>
+              </a:rPr>
+              <a:t>—and compare their outputs to </a:t>
+            </a:r>
+            <a:r>
+              <a:rPr lang="en-US" sz="1200" b="1" kern="1200" dirty="0">
+                <a:solidFill>
+                  <a:schemeClr val="tx1"/>
+                </a:solidFill>
+                <a:effectLst/>
+                <a:latin typeface="+mn-lt"/>
+                <a:ea typeface="+mn-ea"/>
+                <a:cs typeface="+mn-cs"/>
+              </a:rPr>
+              <a:t>observed data</a:t>
+            </a:r>
+            <a:r>
+              <a:rPr lang="en-US" sz="1200" kern="1200" dirty="0">
+                <a:solidFill>
+                  <a:schemeClr val="tx1"/>
+                </a:solidFill>
+                <a:effectLst/>
+                <a:latin typeface="+mn-lt"/>
+                <a:ea typeface="+mn-ea"/>
+                <a:cs typeface="+mn-cs"/>
+              </a:rPr>
+              <a:t> using several </a:t>
+            </a:r>
+            <a:r>
+              <a:rPr lang="en-US" sz="1200" b="1" kern="1200" dirty="0">
+                <a:solidFill>
+                  <a:schemeClr val="tx1"/>
+                </a:solidFill>
+                <a:effectLst/>
+                <a:latin typeface="+mn-lt"/>
+                <a:ea typeface="+mn-ea"/>
+                <a:cs typeface="+mn-cs"/>
+              </a:rPr>
+              <a:t>metrics</a:t>
+            </a:r>
+            <a:r>
+              <a:rPr lang="en-US" sz="1200" kern="1200" dirty="0">
+                <a:solidFill>
+                  <a:schemeClr val="tx1"/>
+                </a:solidFill>
+                <a:effectLst/>
+                <a:latin typeface="+mn-lt"/>
+                <a:ea typeface="+mn-ea"/>
+                <a:cs typeface="+mn-cs"/>
+              </a:rPr>
+              <a:t> across different </a:t>
+            </a:r>
+            <a:r>
+              <a:rPr lang="en-US" sz="1200" b="1" kern="1200" dirty="0">
+                <a:solidFill>
+                  <a:schemeClr val="tx1"/>
+                </a:solidFill>
+                <a:effectLst/>
+                <a:latin typeface="+mn-lt"/>
+                <a:ea typeface="+mn-ea"/>
+                <a:cs typeface="+mn-cs"/>
+              </a:rPr>
+              <a:t>timescales</a:t>
+            </a:r>
+            <a:r>
+              <a:rPr lang="en-US" sz="1200" kern="1200" dirty="0">
+                <a:solidFill>
+                  <a:schemeClr val="tx1"/>
+                </a:solidFill>
+                <a:effectLst/>
+                <a:latin typeface="+mn-lt"/>
+                <a:ea typeface="+mn-ea"/>
+                <a:cs typeface="+mn-cs"/>
+              </a:rPr>
+              <a:t>. This comparison helps us determine whether the Big Tree model truly represents </a:t>
+            </a:r>
+            <a:r>
+              <a:rPr lang="en-US" sz="1200" b="1" kern="1200" dirty="0">
+                <a:solidFill>
+                  <a:schemeClr val="tx1"/>
+                </a:solidFill>
+                <a:effectLst/>
+                <a:latin typeface="+mn-lt"/>
+                <a:ea typeface="+mn-ea"/>
+                <a:cs typeface="+mn-cs"/>
+              </a:rPr>
+              <a:t>reality</a:t>
+            </a:r>
+            <a:r>
+              <a:rPr lang="en-US" sz="1200" kern="1200" dirty="0">
+                <a:solidFill>
+                  <a:schemeClr val="tx1"/>
+                </a:solidFill>
+                <a:effectLst/>
+                <a:latin typeface="+mn-lt"/>
+                <a:ea typeface="+mn-ea"/>
+                <a:cs typeface="+mn-cs"/>
+              </a:rPr>
+              <a:t> more accurately.</a:t>
+            </a:r>
+          </a:p>
+          <a:p>
+            <a:r>
+              <a:rPr lang="en-US" sz="1200" kern="1200" dirty="0">
+                <a:solidFill>
+                  <a:schemeClr val="tx1"/>
+                </a:solidFill>
+                <a:effectLst/>
+                <a:latin typeface="+mn-lt"/>
+                <a:ea typeface="+mn-ea"/>
+                <a:cs typeface="+mn-cs"/>
+              </a:rPr>
+              <a:t>So why does any of this matter? Understanding how plants interact with </a:t>
+            </a:r>
+            <a:r>
+              <a:rPr lang="en-US" sz="1200" b="1" kern="1200" dirty="0">
+                <a:solidFill>
+                  <a:schemeClr val="tx1"/>
+                </a:solidFill>
+                <a:effectLst/>
+                <a:latin typeface="+mn-lt"/>
+                <a:ea typeface="+mn-ea"/>
+                <a:cs typeface="+mn-cs"/>
+              </a:rPr>
+              <a:t>water</a:t>
+            </a:r>
+            <a:r>
+              <a:rPr lang="en-US" sz="1200" kern="1200" dirty="0">
+                <a:solidFill>
+                  <a:schemeClr val="tx1"/>
+                </a:solidFill>
+                <a:effectLst/>
+                <a:latin typeface="+mn-lt"/>
+                <a:ea typeface="+mn-ea"/>
+                <a:cs typeface="+mn-cs"/>
+              </a:rPr>
+              <a:t> is essential for predicting </a:t>
+            </a:r>
+            <a:r>
+              <a:rPr lang="en-US" sz="1200" b="1" kern="1200" dirty="0">
+                <a:solidFill>
+                  <a:schemeClr val="tx1"/>
+                </a:solidFill>
+                <a:effectLst/>
+                <a:latin typeface="+mn-lt"/>
+                <a:ea typeface="+mn-ea"/>
+                <a:cs typeface="+mn-cs"/>
+              </a:rPr>
+              <a:t>drought impacts</a:t>
+            </a:r>
+            <a:r>
+              <a:rPr lang="en-US" sz="1200" kern="1200" dirty="0">
+                <a:solidFill>
+                  <a:schemeClr val="tx1"/>
+                </a:solidFill>
+                <a:effectLst/>
+                <a:latin typeface="+mn-lt"/>
+                <a:ea typeface="+mn-ea"/>
+                <a:cs typeface="+mn-cs"/>
+              </a:rPr>
+              <a:t>, improving </a:t>
+            </a:r>
+            <a:r>
+              <a:rPr lang="en-US" sz="1200" b="1" kern="1200" dirty="0">
+                <a:solidFill>
+                  <a:schemeClr val="tx1"/>
+                </a:solidFill>
+                <a:effectLst/>
+                <a:latin typeface="+mn-lt"/>
+                <a:ea typeface="+mn-ea"/>
+                <a:cs typeface="+mn-cs"/>
+              </a:rPr>
+              <a:t>agricultural management</a:t>
+            </a:r>
+            <a:r>
+              <a:rPr lang="en-US" sz="1200" kern="1200" dirty="0">
+                <a:solidFill>
+                  <a:schemeClr val="tx1"/>
+                </a:solidFill>
+                <a:effectLst/>
+                <a:latin typeface="+mn-lt"/>
+                <a:ea typeface="+mn-ea"/>
+                <a:cs typeface="+mn-cs"/>
+              </a:rPr>
+              <a:t>, and producing better </a:t>
+            </a:r>
+            <a:r>
+              <a:rPr lang="en-US" sz="1200" b="1" kern="1200" dirty="0">
+                <a:solidFill>
+                  <a:schemeClr val="tx1"/>
+                </a:solidFill>
+                <a:effectLst/>
+                <a:latin typeface="+mn-lt"/>
+                <a:ea typeface="+mn-ea"/>
+                <a:cs typeface="+mn-cs"/>
+              </a:rPr>
+              <a:t>climate forecasts</a:t>
+            </a:r>
+            <a:r>
+              <a:rPr lang="en-US" sz="1200" kern="1200" dirty="0">
+                <a:solidFill>
+                  <a:schemeClr val="tx1"/>
+                </a:solidFill>
+                <a:effectLst/>
+                <a:latin typeface="+mn-lt"/>
+                <a:ea typeface="+mn-ea"/>
+                <a:cs typeface="+mn-cs"/>
+              </a:rPr>
+              <a:t>. A model that incorporates realistic </a:t>
+            </a:r>
+            <a:r>
+              <a:rPr lang="en-US" sz="1200" b="1" kern="1200" dirty="0">
+                <a:solidFill>
+                  <a:schemeClr val="tx1"/>
+                </a:solidFill>
+                <a:effectLst/>
+                <a:latin typeface="+mn-lt"/>
+                <a:ea typeface="+mn-ea"/>
+                <a:cs typeface="+mn-cs"/>
+              </a:rPr>
+              <a:t>plant hydraulics</a:t>
+            </a:r>
+            <a:r>
+              <a:rPr lang="en-US" sz="1200" kern="1200" dirty="0">
+                <a:solidFill>
+                  <a:schemeClr val="tx1"/>
+                </a:solidFill>
+                <a:effectLst/>
+                <a:latin typeface="+mn-lt"/>
+                <a:ea typeface="+mn-ea"/>
+                <a:cs typeface="+mn-cs"/>
+              </a:rPr>
+              <a:t> can dramatically reduce simulation </a:t>
+            </a:r>
+            <a:r>
+              <a:rPr lang="en-US" sz="1200" b="1" kern="1200" dirty="0">
+                <a:solidFill>
+                  <a:schemeClr val="tx1"/>
+                </a:solidFill>
+                <a:effectLst/>
+                <a:latin typeface="+mn-lt"/>
+                <a:ea typeface="+mn-ea"/>
+                <a:cs typeface="+mn-cs"/>
+              </a:rPr>
+              <a:t>errors</a:t>
+            </a:r>
+            <a:r>
+              <a:rPr lang="en-US" sz="1200" kern="1200" dirty="0">
+                <a:solidFill>
+                  <a:schemeClr val="tx1"/>
+                </a:solidFill>
+                <a:effectLst/>
+                <a:latin typeface="+mn-lt"/>
+                <a:ea typeface="+mn-ea"/>
+                <a:cs typeface="+mn-cs"/>
+              </a:rPr>
+              <a:t> and improve our ability to predict what’s happening in </a:t>
+            </a:r>
+            <a:r>
+              <a:rPr lang="en-US" sz="1200" b="1" kern="1200" dirty="0">
+                <a:solidFill>
+                  <a:schemeClr val="tx1"/>
+                </a:solidFill>
+                <a:effectLst/>
+                <a:latin typeface="+mn-lt"/>
+                <a:ea typeface="+mn-ea"/>
+                <a:cs typeface="+mn-cs"/>
+              </a:rPr>
+              <a:t>nature</a:t>
+            </a:r>
+            <a:r>
+              <a:rPr lang="en-US" sz="1200" kern="1200" dirty="0">
+                <a:solidFill>
+                  <a:schemeClr val="tx1"/>
+                </a:solidFill>
+                <a:effectLst/>
+                <a:latin typeface="+mn-lt"/>
+                <a:ea typeface="+mn-ea"/>
+                <a:cs typeface="+mn-cs"/>
+              </a:rPr>
+              <a:t>.</a:t>
+            </a:r>
+          </a:p>
+          <a:p>
+            <a:r>
+              <a:rPr lang="en-US" sz="1200" kern="1200" dirty="0">
+                <a:solidFill>
+                  <a:schemeClr val="tx1"/>
+                </a:solidFill>
+                <a:effectLst/>
+                <a:latin typeface="+mn-lt"/>
+                <a:ea typeface="+mn-ea"/>
+                <a:cs typeface="+mn-cs"/>
+              </a:rPr>
+              <a:t>That’s the big picture. The </a:t>
+            </a:r>
+            <a:r>
+              <a:rPr lang="en-US" sz="1200" b="1" kern="1200" dirty="0">
+                <a:solidFill>
+                  <a:schemeClr val="tx1"/>
+                </a:solidFill>
+                <a:effectLst/>
+                <a:latin typeface="+mn-lt"/>
+                <a:ea typeface="+mn-ea"/>
+                <a:cs typeface="+mn-cs"/>
+              </a:rPr>
+              <a:t>Big Leaf</a:t>
+            </a:r>
+            <a:r>
+              <a:rPr lang="en-US" sz="1200" kern="1200" dirty="0">
+                <a:solidFill>
+                  <a:schemeClr val="tx1"/>
+                </a:solidFill>
+                <a:effectLst/>
+                <a:latin typeface="+mn-lt"/>
+                <a:ea typeface="+mn-ea"/>
+                <a:cs typeface="+mn-cs"/>
+              </a:rPr>
+              <a:t> model offers </a:t>
+            </a:r>
+            <a:r>
+              <a:rPr lang="en-US" sz="1200" b="1" kern="1200" dirty="0">
+                <a:solidFill>
+                  <a:schemeClr val="tx1"/>
+                </a:solidFill>
+                <a:effectLst/>
+                <a:latin typeface="+mn-lt"/>
+                <a:ea typeface="+mn-ea"/>
+                <a:cs typeface="+mn-cs"/>
+              </a:rPr>
+              <a:t>simplicity</a:t>
+            </a:r>
+            <a:r>
+              <a:rPr lang="en-US" sz="1200" kern="1200" dirty="0">
+                <a:solidFill>
+                  <a:schemeClr val="tx1"/>
+                </a:solidFill>
+                <a:effectLst/>
+                <a:latin typeface="+mn-lt"/>
+                <a:ea typeface="+mn-ea"/>
+                <a:cs typeface="+mn-cs"/>
+              </a:rPr>
+              <a:t>, but at the cost of </a:t>
+            </a:r>
+            <a:r>
+              <a:rPr lang="en-US" sz="1200" b="1" kern="1200" dirty="0">
+                <a:solidFill>
+                  <a:schemeClr val="tx1"/>
+                </a:solidFill>
+                <a:effectLst/>
+                <a:latin typeface="+mn-lt"/>
+                <a:ea typeface="+mn-ea"/>
+                <a:cs typeface="+mn-cs"/>
+              </a:rPr>
+              <a:t>accuracy</a:t>
+            </a:r>
+            <a:r>
+              <a:rPr lang="en-US" sz="1200" kern="1200" dirty="0">
+                <a:solidFill>
+                  <a:schemeClr val="tx1"/>
+                </a:solidFill>
+                <a:effectLst/>
+                <a:latin typeface="+mn-lt"/>
+                <a:ea typeface="+mn-ea"/>
+                <a:cs typeface="+mn-cs"/>
+              </a:rPr>
+              <a:t>. The </a:t>
+            </a:r>
+            <a:r>
+              <a:rPr lang="en-US" sz="1200" b="1" kern="1200" dirty="0">
+                <a:solidFill>
+                  <a:schemeClr val="tx1"/>
+                </a:solidFill>
+                <a:effectLst/>
+                <a:latin typeface="+mn-lt"/>
+                <a:ea typeface="+mn-ea"/>
+                <a:cs typeface="+mn-cs"/>
+              </a:rPr>
+              <a:t>Big Tree</a:t>
+            </a:r>
+            <a:r>
+              <a:rPr lang="en-US" sz="1200" kern="1200" dirty="0">
+                <a:solidFill>
+                  <a:schemeClr val="tx1"/>
+                </a:solidFill>
+                <a:effectLst/>
+                <a:latin typeface="+mn-lt"/>
+                <a:ea typeface="+mn-ea"/>
+                <a:cs typeface="+mn-cs"/>
+              </a:rPr>
+              <a:t> model provides a more complete representation of </a:t>
+            </a:r>
+            <a:r>
+              <a:rPr lang="en-US" sz="1200" b="1" kern="1200" dirty="0">
+                <a:solidFill>
+                  <a:schemeClr val="tx1"/>
+                </a:solidFill>
+                <a:effectLst/>
+                <a:latin typeface="+mn-lt"/>
+                <a:ea typeface="+mn-ea"/>
+                <a:cs typeface="+mn-cs"/>
+              </a:rPr>
+              <a:t>plant water transport</a:t>
+            </a:r>
+            <a:r>
+              <a:rPr lang="en-US" sz="1200" kern="1200" dirty="0">
+                <a:solidFill>
+                  <a:schemeClr val="tx1"/>
+                </a:solidFill>
+                <a:effectLst/>
+                <a:latin typeface="+mn-lt"/>
+                <a:ea typeface="+mn-ea"/>
+                <a:cs typeface="+mn-cs"/>
+              </a:rPr>
+              <a:t>, which can make a meaningful difference in forecasting </a:t>
+            </a:r>
+            <a:r>
+              <a:rPr lang="en-US" sz="1200" b="1" kern="1200" dirty="0">
+                <a:solidFill>
+                  <a:schemeClr val="tx1"/>
+                </a:solidFill>
+                <a:effectLst/>
+                <a:latin typeface="+mn-lt"/>
+                <a:ea typeface="+mn-ea"/>
+                <a:cs typeface="+mn-cs"/>
+              </a:rPr>
+              <a:t>ecosystem behavior</a:t>
+            </a:r>
+            <a:r>
+              <a:rPr lang="en-US" sz="1200" kern="1200" dirty="0">
+                <a:solidFill>
+                  <a:schemeClr val="tx1"/>
+                </a:solidFill>
+                <a:effectLst/>
+                <a:latin typeface="+mn-lt"/>
+                <a:ea typeface="+mn-ea"/>
+                <a:cs typeface="+mn-cs"/>
+              </a:rPr>
+              <a:t>. </a:t>
+            </a:r>
+            <a:r>
+              <a:rPr lang="en-US" sz="1200" kern="1200">
+                <a:solidFill>
+                  <a:schemeClr val="tx1"/>
+                </a:solidFill>
+                <a:effectLst/>
+                <a:latin typeface="+mn-lt"/>
+                <a:ea typeface="+mn-ea"/>
+                <a:cs typeface="+mn-cs"/>
+              </a:rPr>
+              <a:t>I’m happy to take any </a:t>
+            </a:r>
+            <a:r>
+              <a:rPr lang="en-US" sz="1200" b="1" kern="1200">
+                <a:solidFill>
+                  <a:schemeClr val="tx1"/>
+                </a:solidFill>
+                <a:effectLst/>
+                <a:latin typeface="+mn-lt"/>
+                <a:ea typeface="+mn-ea"/>
+                <a:cs typeface="+mn-cs"/>
+              </a:rPr>
+              <a:t>questions</a:t>
+            </a:r>
+            <a:r>
+              <a:rPr lang="en-US" sz="1200" kern="1200">
+                <a:solidFill>
+                  <a:schemeClr val="tx1"/>
+                </a:solidFill>
+                <a:effectLst/>
+                <a:latin typeface="+mn-lt"/>
+                <a:ea typeface="+mn-ea"/>
+                <a:cs typeface="+mn-cs"/>
+              </a:rPr>
+              <a:t> you might have!</a:t>
+            </a:r>
+          </a:p>
+          <a:p>
             <a:pPr>
               <a:buNone/>
             </a:pPr>
-            <a:r>
-              <a:rPr lang="en-US" b="1" dirty="0"/>
-              <a:t>Introduction to a Key Concept in Land Surface Modeling: “Big Leaf” vs. “Big Tree”</a:t>
-            </a:r>
-          </a:p>
-          <a:p>
-            <a:pPr>
-              <a:buNone/>
-            </a:pPr>
-            <a:r>
-              <a:rPr lang="en-US" dirty="0"/>
-              <a:t>Hi everyone! Today I’ll introduce a basic concept in land surface modeling: the difference between the </a:t>
-            </a:r>
-            <a:r>
-              <a:rPr lang="en-US" b="1" dirty="0"/>
-              <a:t>“Big Leaf”</a:t>
-            </a:r>
-            <a:r>
-              <a:rPr lang="en-US" dirty="0"/>
-              <a:t> and </a:t>
-            </a:r>
-            <a:r>
-              <a:rPr lang="en-US" b="1" dirty="0"/>
-              <a:t>“Big Tree”</a:t>
-            </a:r>
-            <a:r>
-              <a:rPr lang="en-US" dirty="0"/>
-              <a:t> approaches. This idea is important because it affects how we simulate water and carbon movement through ecosystems — which is critical for understanding droughts, agriculture, and climate change.</a:t>
-            </a:r>
-          </a:p>
-          <a:p>
-            <a:pPr>
-              <a:buNone/>
-            </a:pPr>
-            <a:r>
-              <a:rPr lang="en-US" b="1" dirty="0"/>
-              <a:t>1. Start with a Simple Analogy</a:t>
-            </a:r>
-          </a:p>
-          <a:p>
-            <a:pPr>
-              <a:buNone/>
-            </a:pPr>
-            <a:r>
-              <a:rPr lang="en-US" dirty="0"/>
-              <a:t>Think of a plant as a machine that moves water from the soil to the atmosphere and uses carbon from the air to grow. To simulate how this works, scientists use computer models. But how detailed these models are can make a big difference.</a:t>
-            </a:r>
-          </a:p>
-          <a:p>
-            <a:pPr>
-              <a:buNone/>
-            </a:pPr>
-            <a:r>
-              <a:rPr lang="en-US" b="1" dirty="0"/>
-              <a:t>2. What is the "Big Leaf" Concept?</a:t>
-            </a:r>
-          </a:p>
-          <a:p>
-            <a:pPr>
-              <a:buNone/>
-            </a:pPr>
-            <a:r>
-              <a:rPr lang="en-US" dirty="0"/>
-              <a:t>Most traditional land surface models, like </a:t>
-            </a:r>
-            <a:r>
-              <a:rPr lang="en-US" b="1" dirty="0"/>
-              <a:t>Noah-MP</a:t>
-            </a:r>
-            <a:r>
-              <a:rPr lang="en-US" dirty="0"/>
-              <a:t>, use what we call the </a:t>
-            </a:r>
-            <a:r>
-              <a:rPr lang="en-US" b="1" dirty="0"/>
-              <a:t>"Big Leaf"</a:t>
-            </a:r>
-            <a:r>
-              <a:rPr lang="en-US" dirty="0"/>
-              <a:t> concept (left side of the diagram).</a:t>
-            </a:r>
-          </a:p>
-          <a:p>
-            <a:pPr>
-              <a:buFont typeface="Arial" panose="020B0604020202020204" pitchFamily="34" charset="0"/>
-              <a:buChar char="•"/>
-            </a:pPr>
-            <a:r>
-              <a:rPr lang="en-US" dirty="0"/>
-              <a:t>Imagine all the plant leaves are combined into </a:t>
-            </a:r>
-            <a:r>
-              <a:rPr lang="en-US" b="1" dirty="0"/>
-              <a:t>one big leaf</a:t>
-            </a:r>
-            <a:r>
-              <a:rPr lang="en-US" dirty="0"/>
-              <a:t>.</a:t>
-            </a:r>
-          </a:p>
-          <a:p>
-            <a:pPr>
-              <a:buFont typeface="Arial" panose="020B0604020202020204" pitchFamily="34" charset="0"/>
-              <a:buChar char="•"/>
-            </a:pPr>
-            <a:r>
-              <a:rPr lang="en-US" dirty="0"/>
-              <a:t>This big leaf responds directly to </a:t>
-            </a:r>
-            <a:r>
-              <a:rPr lang="en-US" b="1" dirty="0"/>
-              <a:t>soil moisture</a:t>
-            </a:r>
-            <a:r>
-              <a:rPr lang="en-US" dirty="0"/>
-              <a:t>, meaning how wet the ground is.</a:t>
-            </a:r>
-          </a:p>
-          <a:p>
-            <a:pPr>
-              <a:buFont typeface="Arial" panose="020B0604020202020204" pitchFamily="34" charset="0"/>
-              <a:buChar char="•"/>
-            </a:pPr>
-            <a:r>
-              <a:rPr lang="en-US" dirty="0"/>
-              <a:t>It doesn't include the inner structure of the plant like stems or roots.</a:t>
-            </a:r>
-          </a:p>
-          <a:p>
-            <a:pPr>
-              <a:buFont typeface="Arial" panose="020B0604020202020204" pitchFamily="34" charset="0"/>
-              <a:buChar char="•"/>
-            </a:pPr>
-            <a:r>
-              <a:rPr lang="en-US" dirty="0"/>
-              <a:t>It uses </a:t>
-            </a:r>
-            <a:r>
-              <a:rPr lang="en-US" b="1" dirty="0"/>
-              <a:t>empirical formulas</a:t>
-            </a:r>
-            <a:r>
-              <a:rPr lang="en-US" dirty="0"/>
-              <a:t> — kind of like guessing based on past observations — to simulate how much water the plant loses and how much carbon it takes in.</a:t>
-            </a:r>
-          </a:p>
-          <a:p>
-            <a:pPr>
-              <a:buNone/>
-            </a:pPr>
-            <a:r>
-              <a:rPr lang="en-US" b="1" dirty="0"/>
-              <a:t>Problems?</a:t>
-            </a:r>
             <a:endParaRPr lang="en-US" dirty="0"/>
-          </a:p>
-          <a:p>
-            <a:pPr>
-              <a:buFont typeface="Arial" panose="020B0604020202020204" pitchFamily="34" charset="0"/>
-              <a:buChar char="•"/>
-            </a:pPr>
-            <a:r>
-              <a:rPr lang="en-US" dirty="0"/>
-              <a:t>It oversimplifies how plants actually move water.</a:t>
-            </a:r>
-          </a:p>
-          <a:p>
-            <a:pPr>
-              <a:buFont typeface="Arial" panose="020B0604020202020204" pitchFamily="34" charset="0"/>
-              <a:buChar char="•"/>
-            </a:pPr>
-            <a:r>
-              <a:rPr lang="en-US" dirty="0"/>
-              <a:t>It introduces </a:t>
-            </a:r>
-            <a:r>
-              <a:rPr lang="en-US" b="1" dirty="0"/>
-              <a:t>uncertainties</a:t>
-            </a:r>
-            <a:r>
-              <a:rPr lang="en-US" dirty="0"/>
-              <a:t>, especially during droughts or extreme conditions.</a:t>
-            </a:r>
-          </a:p>
-          <a:p>
-            <a:pPr>
-              <a:buNone/>
-            </a:pPr>
-            <a:r>
-              <a:rPr lang="en-US" b="1" dirty="0"/>
-              <a:t>3. What is the "Big Tree" Concept?</a:t>
-            </a:r>
-          </a:p>
-          <a:p>
-            <a:pPr>
-              <a:buNone/>
-            </a:pPr>
-            <a:r>
-              <a:rPr lang="en-US" dirty="0"/>
-              <a:t>Now look at the right side of the diagram. The </a:t>
-            </a:r>
-            <a:r>
-              <a:rPr lang="en-US" b="1" dirty="0"/>
-              <a:t>"Big Tree"</a:t>
-            </a:r>
-            <a:r>
-              <a:rPr lang="en-US" dirty="0"/>
-              <a:t> approach, used in a new version called </a:t>
-            </a:r>
-            <a:r>
-              <a:rPr lang="en-US" b="1" dirty="0"/>
-              <a:t>Noah-MP-PHS</a:t>
-            </a:r>
-            <a:r>
-              <a:rPr lang="en-US" dirty="0"/>
-              <a:t>, adds </a:t>
-            </a:r>
-            <a:r>
-              <a:rPr lang="en-US" b="1" dirty="0"/>
-              <a:t>whole-plant hydraulics</a:t>
-            </a:r>
-            <a:r>
-              <a:rPr lang="en-US" dirty="0"/>
-              <a:t>.</a:t>
-            </a:r>
-          </a:p>
-          <a:p>
-            <a:pPr>
-              <a:buNone/>
-            </a:pPr>
-            <a:r>
-              <a:rPr lang="en-US" dirty="0"/>
-              <a:t>This means:</a:t>
-            </a:r>
-          </a:p>
-          <a:p>
-            <a:pPr>
-              <a:buFont typeface="Arial" panose="020B0604020202020204" pitchFamily="34" charset="0"/>
-              <a:buChar char="•"/>
-            </a:pPr>
-            <a:r>
-              <a:rPr lang="en-US" dirty="0"/>
-              <a:t>Water is tracked all the way from the soil → through roots → up the stem → to the leaves.</a:t>
-            </a:r>
-          </a:p>
-          <a:p>
-            <a:pPr>
-              <a:buFont typeface="Arial" panose="020B0604020202020204" pitchFamily="34" charset="0"/>
-              <a:buChar char="•"/>
-            </a:pPr>
-            <a:r>
-              <a:rPr lang="en-US" dirty="0"/>
-              <a:t>It includes physical properties like:</a:t>
-            </a:r>
-          </a:p>
-          <a:p>
-            <a:pPr marL="742950" lvl="1" indent="-285750">
-              <a:buFont typeface="Arial" panose="020B0604020202020204" pitchFamily="34" charset="0"/>
-              <a:buChar char="•"/>
-            </a:pPr>
-            <a:r>
-              <a:rPr lang="en-US" dirty="0"/>
-              <a:t>Root and stem </a:t>
-            </a:r>
-            <a:r>
-              <a:rPr lang="en-US" b="1" dirty="0"/>
-              <a:t>conductance</a:t>
-            </a:r>
-            <a:r>
-              <a:rPr lang="en-US" dirty="0"/>
-              <a:t> (how easily water moves),</a:t>
-            </a:r>
-          </a:p>
-          <a:p>
-            <a:pPr marL="742950" lvl="1" indent="-285750">
-              <a:buFont typeface="Arial" panose="020B0604020202020204" pitchFamily="34" charset="0"/>
-              <a:buChar char="•"/>
-            </a:pPr>
-            <a:r>
-              <a:rPr lang="en-US" dirty="0"/>
-              <a:t>Stem and leaf </a:t>
-            </a:r>
-            <a:r>
-              <a:rPr lang="en-US" b="1" dirty="0"/>
-              <a:t>capacitance</a:t>
-            </a:r>
-            <a:r>
-              <a:rPr lang="en-US" dirty="0"/>
-              <a:t> (how much water they can hold temporarily),</a:t>
-            </a:r>
-          </a:p>
-          <a:p>
-            <a:pPr marL="742950" lvl="1" indent="-285750">
-              <a:buFont typeface="Arial" panose="020B0604020202020204" pitchFamily="34" charset="0"/>
-              <a:buChar char="•"/>
-            </a:pPr>
-            <a:r>
-              <a:rPr lang="en-US" b="1" dirty="0"/>
-              <a:t>Sap flow</a:t>
-            </a:r>
-            <a:r>
-              <a:rPr lang="en-US" dirty="0"/>
-              <a:t>, which is the actual movement of water inside the plant.</a:t>
-            </a:r>
-          </a:p>
-          <a:p>
-            <a:pPr>
-              <a:buNone/>
-            </a:pPr>
-            <a:r>
-              <a:rPr lang="en-US" dirty="0"/>
-              <a:t>By modeling the full path of water, from </a:t>
-            </a:r>
-            <a:r>
-              <a:rPr lang="en-US" b="1" dirty="0"/>
-              <a:t>soil to air</a:t>
-            </a:r>
-            <a:r>
-              <a:rPr lang="en-US" dirty="0"/>
-              <a:t>, we reduce the uncertainties in simulating how plants behave under stress.</a:t>
-            </a:r>
-          </a:p>
-          <a:p>
-            <a:pPr>
-              <a:buNone/>
-            </a:pPr>
-            <a:r>
-              <a:rPr lang="en-US" b="1" dirty="0"/>
-              <a:t>4. How Do We Test These Models?</a:t>
-            </a:r>
-          </a:p>
-          <a:p>
-            <a:pPr>
-              <a:buNone/>
-            </a:pPr>
-            <a:r>
-              <a:rPr lang="en-US" dirty="0"/>
-              <a:t>On the far right of the diagram is a </a:t>
-            </a:r>
-            <a:r>
-              <a:rPr lang="en-US" b="1" dirty="0"/>
-              <a:t>flowchart</a:t>
-            </a:r>
-            <a:r>
-              <a:rPr lang="en-US" dirty="0"/>
-              <a:t> showing how we test if the new model works:</a:t>
-            </a:r>
-          </a:p>
-          <a:p>
-            <a:pPr>
-              <a:buFont typeface="Arial" panose="020B0604020202020204" pitchFamily="34" charset="0"/>
-              <a:buChar char="•"/>
-            </a:pPr>
-            <a:r>
-              <a:rPr lang="en-US" dirty="0"/>
-              <a:t>We use a real-world site (US-Syv) and collect data from instruments like the </a:t>
-            </a:r>
-            <a:r>
-              <a:rPr lang="en-US" b="1" dirty="0"/>
-              <a:t>AmeriFlux tower</a:t>
-            </a:r>
-            <a:r>
-              <a:rPr lang="en-US" dirty="0"/>
-              <a:t>, which tells us how much water and carbon are going in and out of the ecosystem.</a:t>
-            </a:r>
-          </a:p>
-          <a:p>
-            <a:pPr>
-              <a:buFont typeface="Arial" panose="020B0604020202020204" pitchFamily="34" charset="0"/>
-              <a:buChar char="•"/>
-            </a:pPr>
-            <a:r>
-              <a:rPr lang="en-US" dirty="0"/>
-              <a:t>We run both models: </a:t>
-            </a:r>
-            <a:r>
-              <a:rPr lang="en-US" b="1" dirty="0"/>
-              <a:t>Noah-MP</a:t>
-            </a:r>
-            <a:r>
-              <a:rPr lang="en-US" dirty="0"/>
-              <a:t> and </a:t>
-            </a:r>
-            <a:r>
-              <a:rPr lang="en-US" b="1" dirty="0"/>
-              <a:t>Noah-MP-PHS</a:t>
-            </a:r>
-            <a:r>
-              <a:rPr lang="en-US" dirty="0"/>
-              <a:t>.</a:t>
-            </a:r>
-          </a:p>
-          <a:p>
-            <a:pPr>
-              <a:buFont typeface="Arial" panose="020B0604020202020204" pitchFamily="34" charset="0"/>
-              <a:buChar char="•"/>
-            </a:pPr>
-            <a:r>
-              <a:rPr lang="en-US" dirty="0"/>
-              <a:t>We compare model outputs to the </a:t>
-            </a:r>
-            <a:r>
-              <a:rPr lang="en-US" b="1" dirty="0"/>
-              <a:t>observed data</a:t>
-            </a:r>
-            <a:r>
-              <a:rPr lang="en-US" dirty="0"/>
-              <a:t>, using three metrics across three timescales.</a:t>
-            </a:r>
-          </a:p>
-          <a:p>
-            <a:pPr>
-              <a:buFont typeface="Arial" panose="020B0604020202020204" pitchFamily="34" charset="0"/>
-              <a:buChar char="•"/>
-            </a:pPr>
-            <a:r>
-              <a:rPr lang="en-US" dirty="0"/>
-              <a:t>Then we </a:t>
-            </a:r>
-            <a:r>
-              <a:rPr lang="en-US" b="1" dirty="0"/>
-              <a:t>draw conclusions</a:t>
-            </a:r>
-            <a:r>
-              <a:rPr lang="en-US" dirty="0"/>
-              <a:t>: does the Big Tree model better represent reality?</a:t>
-            </a:r>
-          </a:p>
-          <a:p>
-            <a:pPr>
-              <a:buNone/>
-            </a:pPr>
-            <a:r>
-              <a:rPr lang="en-US" b="1" dirty="0"/>
-              <a:t>5. Why Does This Matter?</a:t>
-            </a:r>
-          </a:p>
-          <a:p>
-            <a:pPr>
-              <a:buNone/>
-            </a:pPr>
-            <a:r>
-              <a:rPr lang="en-US" dirty="0"/>
-              <a:t>Understanding how plants interact with water is crucial for predicting drought impacts, managing agriculture, and forecasting climate change. The </a:t>
-            </a:r>
-            <a:r>
-              <a:rPr lang="en-US" b="1" dirty="0"/>
-              <a:t>Big Tree</a:t>
-            </a:r>
-            <a:r>
-              <a:rPr lang="en-US" dirty="0"/>
-              <a:t> model gives us a more realistic tool to simulate what’s happening in nature.</a:t>
-            </a:r>
-          </a:p>
-          <a:p>
-            <a:pPr>
-              <a:buNone/>
-            </a:pPr>
-            <a:r>
-              <a:rPr lang="en-US" b="1" dirty="0"/>
-              <a:t>Closing</a:t>
-            </a:r>
-          </a:p>
-          <a:p>
-            <a:pPr>
-              <a:buNone/>
-            </a:pPr>
-            <a:r>
-              <a:rPr lang="en-US" dirty="0"/>
-              <a:t>So, to summarize:</a:t>
-            </a:r>
-          </a:p>
-          <a:p>
-            <a:pPr>
-              <a:buFont typeface="Arial" panose="020B0604020202020204" pitchFamily="34" charset="0"/>
-              <a:buChar char="•"/>
-            </a:pPr>
-            <a:r>
-              <a:rPr lang="en-US" b="1" dirty="0"/>
-              <a:t>Big Leaf</a:t>
-            </a:r>
-            <a:r>
-              <a:rPr lang="en-US" dirty="0"/>
-              <a:t> is simple but introduces uncertainties.</a:t>
-            </a:r>
-          </a:p>
-          <a:p>
-            <a:pPr>
-              <a:buFont typeface="Arial" panose="020B0604020202020204" pitchFamily="34" charset="0"/>
-              <a:buChar char="•"/>
-            </a:pPr>
-            <a:r>
-              <a:rPr lang="en-US" b="1" dirty="0"/>
-              <a:t>Big Tree</a:t>
-            </a:r>
-            <a:r>
-              <a:rPr lang="en-US" dirty="0"/>
-              <a:t> is more realistic by modeling full plant water transport.</a:t>
-            </a:r>
-          </a:p>
-          <a:p>
-            <a:pPr>
-              <a:buFont typeface="Arial" panose="020B0604020202020204" pitchFamily="34" charset="0"/>
-              <a:buChar char="•"/>
-            </a:pPr>
-            <a:r>
-              <a:rPr lang="en-US" dirty="0"/>
-              <a:t>New models like </a:t>
-            </a:r>
-            <a:r>
-              <a:rPr lang="en-US" b="1" dirty="0"/>
-              <a:t>Noah-MP-PHS</a:t>
-            </a:r>
-            <a:r>
-              <a:rPr lang="en-US" dirty="0"/>
-              <a:t> aim to reduce simulation errors and improve predictions.</a:t>
-            </a:r>
-          </a:p>
-          <a:p>
-            <a:pPr>
-              <a:buNone/>
-            </a:pPr>
-            <a:r>
-              <a:rPr lang="en-US" b="1" dirty="0"/>
-              <a:t>Ready for Questions</a:t>
-            </a:r>
-          </a:p>
-          <a:p>
-            <a:r>
-              <a:rPr lang="en-US" dirty="0"/>
-              <a:t>Now that you’ve seen the concept, I’d be happy to answer any questions you have!</a:t>
-            </a:r>
           </a:p>
         </p:txBody>
       </p:sp>
@@ -1256,7 +2323,7 @@
           <a:p>
             <a:fld id="{879A20B3-C5FA-4FED-B365-CC7D1EAD6AE8}" type="datetimeFigureOut">
               <a:rPr lang="en-001" smtClean="0"/>
-              <a:t>5/1/25</a:t>
+              <a:t>12/9/25</a:t>
             </a:fld>
             <a:endParaRPr lang="en-001"/>
           </a:p>
@@ -1456,7 +2523,7 @@
           <a:p>
             <a:fld id="{879A20B3-C5FA-4FED-B365-CC7D1EAD6AE8}" type="datetimeFigureOut">
               <a:rPr lang="en-001" smtClean="0"/>
-              <a:t>5/1/25</a:t>
+              <a:t>12/9/25</a:t>
             </a:fld>
             <a:endParaRPr lang="en-001"/>
           </a:p>
@@ -1666,7 +2733,7 @@
           <a:p>
             <a:fld id="{879A20B3-C5FA-4FED-B365-CC7D1EAD6AE8}" type="datetimeFigureOut">
               <a:rPr lang="en-001" smtClean="0"/>
-              <a:t>5/1/25</a:t>
+              <a:t>12/9/25</a:t>
             </a:fld>
             <a:endParaRPr lang="en-001"/>
           </a:p>
@@ -2231,7 +3298,7 @@
           <a:p>
             <a:fld id="{879A20B3-C5FA-4FED-B365-CC7D1EAD6AE8}" type="datetimeFigureOut">
               <a:rPr lang="en-001" smtClean="0"/>
-              <a:t>5/1/25</a:t>
+              <a:t>12/9/25</a:t>
             </a:fld>
             <a:endParaRPr lang="en-001"/>
           </a:p>
@@ -2507,7 +3574,7 @@
           <a:p>
             <a:fld id="{879A20B3-C5FA-4FED-B365-CC7D1EAD6AE8}" type="datetimeFigureOut">
               <a:rPr lang="en-001" smtClean="0"/>
-              <a:t>5/1/25</a:t>
+              <a:t>12/9/25</a:t>
             </a:fld>
             <a:endParaRPr lang="en-001"/>
           </a:p>
@@ -2775,7 +3842,7 @@
           <a:p>
             <a:fld id="{879A20B3-C5FA-4FED-B365-CC7D1EAD6AE8}" type="datetimeFigureOut">
               <a:rPr lang="en-001" smtClean="0"/>
-              <a:t>5/1/25</a:t>
+              <a:t>12/9/25</a:t>
             </a:fld>
             <a:endParaRPr lang="en-001"/>
           </a:p>
@@ -3190,7 +4257,7 @@
           <a:p>
             <a:fld id="{879A20B3-C5FA-4FED-B365-CC7D1EAD6AE8}" type="datetimeFigureOut">
               <a:rPr lang="en-001" smtClean="0"/>
-              <a:t>5/1/25</a:t>
+              <a:t>12/9/25</a:t>
             </a:fld>
             <a:endParaRPr lang="en-001"/>
           </a:p>
@@ -3332,7 +4399,7 @@
           <a:p>
             <a:fld id="{879A20B3-C5FA-4FED-B365-CC7D1EAD6AE8}" type="datetimeFigureOut">
               <a:rPr lang="en-001" smtClean="0"/>
-              <a:t>5/1/25</a:t>
+              <a:t>12/9/25</a:t>
             </a:fld>
             <a:endParaRPr lang="en-001"/>
           </a:p>
@@ -3445,7 +4512,7 @@
           <a:p>
             <a:fld id="{879A20B3-C5FA-4FED-B365-CC7D1EAD6AE8}" type="datetimeFigureOut">
               <a:rPr lang="en-001" smtClean="0"/>
-              <a:t>5/1/25</a:t>
+              <a:t>12/9/25</a:t>
             </a:fld>
             <a:endParaRPr lang="en-001"/>
           </a:p>
@@ -3758,7 +4825,7 @@
           <a:p>
             <a:fld id="{879A20B3-C5FA-4FED-B365-CC7D1EAD6AE8}" type="datetimeFigureOut">
               <a:rPr lang="en-001" smtClean="0"/>
-              <a:t>5/1/25</a:t>
+              <a:t>12/9/25</a:t>
             </a:fld>
             <a:endParaRPr lang="en-001"/>
           </a:p>
@@ -4047,7 +5114,7 @@
           <a:p>
             <a:fld id="{879A20B3-C5FA-4FED-B365-CC7D1EAD6AE8}" type="datetimeFigureOut">
               <a:rPr lang="en-001" smtClean="0"/>
-              <a:t>5/1/25</a:t>
+              <a:t>12/9/25</a:t>
             </a:fld>
             <a:endParaRPr lang="en-001"/>
           </a:p>
@@ -4290,7 +5357,7 @@
           <a:p>
             <a:fld id="{879A20B3-C5FA-4FED-B365-CC7D1EAD6AE8}" type="datetimeFigureOut">
               <a:rPr lang="en-001" smtClean="0"/>
-              <a:t>5/1/25</a:t>
+              <a:t>12/9/25</a:t>
             </a:fld>
             <a:endParaRPr lang="en-001"/>
           </a:p>
